--- a/10-Knowledge-Products/KP1-GEA/videos/module_2/en/decks/KP1_M2_2.2_Deck_v0.1.pptx
+++ b/10-Knowledge-Products/KP1-GEA/videos/module_2/en/decks/KP1_M2_2.2_Deck_v0.1.pptx
@@ -1083,6 +1083,12 @@
               <a:t>VO: The entities are half of it. The relationships are the other half. A Capability is delivered by a Service. A Capability is supported by an Application. An Application uses a Data Domain. Everything runs on a Technology Component. An Organisation owns each of these. These relationships are fixed. You do not invent them per ministry. Once every team uses the same entities and the same relationships, every ministry's picture can be laid over every other ministry's picture — and they line up.</a:t>
             </a:r>
           </a:p>
+          <a:p/>
+          <a:p>
+            <a:r>
+              <a:t>On screen: the metamodel drawn as a graph — arrows are the relationships; Technology is the base everything stands on; Organisation brackets the lot as owner. Reveal the arrows in the order the VO names them.</a:t>
+            </a:r>
+          </a:p>
         </p:txBody>
       </p:sp>
       <p:sp>
@@ -13302,59 +13308,97 @@
       </p:sp>
       <p:sp>
         <p:nvSpPr>
-          <p:cNvPr id="4" name="TextBox 3"/>
-          <p:cNvSpPr txBox="1"/>
+          <p:cNvPr id="4" name="Rounded Rectangle 3"/>
+          <p:cNvSpPr/>
           <p:nvPr/>
         </p:nvSpPr>
         <p:spPr>
           <a:xfrm>
-            <a:off x="658368" y="1463040"/>
-            <a:ext cx="10984687" cy="786384"/>
-          </a:xfrm>
-          <a:prstGeom prst="rect">
-            <a:avLst/>
+            <a:off x="658368" y="1600200"/>
+            <a:ext cx="1828800" cy="3840480"/>
+          </a:xfrm>
+          <a:prstGeom prst="roundRect">
+            <a:avLst>
+              <a:gd name="adj" fmla="val 8000"/>
+            </a:avLst>
           </a:prstGeom>
-          <a:noFill/>
-        </p:spPr>
-        <p:txBody>
-          <a:bodyPr wrap="square">
-            <a:spAutoFit/>
-          </a:bodyPr>
+          <a:solidFill>
+            <a:srgbClr val="F2F2F2"/>
+          </a:solidFill>
+          <a:ln>
+            <a:noFill/>
+          </a:ln>
+          <a:effectLst/>
+        </p:spPr>
+        <p:style>
+          <a:lnRef idx="1">
+            <a:schemeClr val="accent1"/>
+          </a:lnRef>
+          <a:fillRef idx="3">
+            <a:schemeClr val="accent1"/>
+          </a:fillRef>
+          <a:effectRef idx="2">
+            <a:schemeClr val="accent1"/>
+          </a:effectRef>
+          <a:fontRef idx="minor">
+            <a:schemeClr val="lt1"/>
+          </a:fontRef>
+        </p:style>
+        <p:txBody>
+          <a:bodyPr rtlCol="0" anchor="t" lIns="128016" rIns="128016" tIns="91440" bIns="54864" wrap="square"/>
           <a:lstStyle/>
           <a:p>
-            <a:pPr>
+            <a:pPr algn="l">
               <a:spcAft>
                 <a:spcPts val="300"/>
               </a:spcAft>
             </a:pPr>
             <a:r>
-              <a:rPr sz="2000" b="1" i="0">
+              <a:rPr sz="1500" b="1" i="0">
+                <a:solidFill>
+                  <a:srgbClr val="006E96"/>
+                </a:solidFill>
+                <a:latin typeface="Arial"/>
+              </a:rPr>
+              <a:t>Organisation</a:t>
+            </a:r>
+          </a:p>
+          <a:p>
+            <a:pPr algn="l">
+              <a:spcAft>
+                <a:spcPts val="300"/>
+              </a:spcAft>
+            </a:pPr>
+            <a:r>
+              <a:rPr sz="1250" b="0" i="0">
                 <a:solidFill>
                   <a:srgbClr val="1A1A1A"/>
                 </a:solidFill>
                 <a:latin typeface="Arial"/>
               </a:rPr>
-              <a:t>Capability  →  delivered by  →  Service</a:t>
-            </a:r>
-          </a:p>
-        </p:txBody>
-      </p:sp>
-      <p:sp>
-        <p:nvSpPr>
-          <p:cNvPr id="5" name="Rectangle 4"/>
+              <a:t>owns each of them</a:t>
+            </a:r>
+          </a:p>
+        </p:txBody>
+      </p:sp>
+      <p:sp>
+        <p:nvSpPr>
+          <p:cNvPr id="5" name="Rounded Rectangle 4"/>
           <p:cNvSpPr/>
           <p:nvPr/>
         </p:nvSpPr>
         <p:spPr>
           <a:xfrm>
-            <a:off x="621792" y="2253996"/>
-            <a:ext cx="10881360" cy="12700"/>
-          </a:xfrm>
-          <a:prstGeom prst="rect">
-            <a:avLst/>
+            <a:off x="3246120" y="1600200"/>
+            <a:ext cx="2651760" cy="960120"/>
+          </a:xfrm>
+          <a:prstGeom prst="roundRect">
+            <a:avLst>
+              <a:gd name="adj" fmla="val 8000"/>
+            </a:avLst>
           </a:prstGeom>
           <a:solidFill>
-            <a:srgbClr val="DDECF4"/>
+            <a:srgbClr val="E5F5FB"/>
           </a:solidFill>
           <a:ln>
             <a:noFill/>
@@ -13376,68 +13420,60 @@
           </a:fontRef>
         </p:style>
         <p:txBody>
-          <a:bodyPr rtlCol="0" anchor="ctr"/>
+          <a:bodyPr rtlCol="0" anchor="t" lIns="128016" rIns="128016" tIns="91440" bIns="54864" wrap="square"/>
           <a:lstStyle/>
           <a:p>
-            <a:pPr algn="ctr"/>
-          </a:p>
-        </p:txBody>
-      </p:sp>
-      <p:sp>
-        <p:nvSpPr>
-          <p:cNvPr id="6" name="TextBox 5"/>
-          <p:cNvSpPr txBox="1"/>
-          <p:nvPr/>
-        </p:nvSpPr>
-        <p:spPr>
-          <a:xfrm>
-            <a:off x="658368" y="2295144"/>
-            <a:ext cx="10984687" cy="786384"/>
-          </a:xfrm>
-          <a:prstGeom prst="rect">
-            <a:avLst/>
-          </a:prstGeom>
-          <a:noFill/>
-        </p:spPr>
-        <p:txBody>
-          <a:bodyPr wrap="square">
-            <a:spAutoFit/>
-          </a:bodyPr>
-          <a:lstStyle/>
-          <a:p>
-            <a:pPr>
+            <a:pPr algn="l">
               <a:spcAft>
                 <a:spcPts val="300"/>
               </a:spcAft>
             </a:pPr>
             <a:r>
-              <a:rPr sz="2000" b="1" i="0">
+              <a:rPr sz="1500" b="1" i="0">
+                <a:solidFill>
+                  <a:srgbClr val="006E96"/>
+                </a:solidFill>
+                <a:latin typeface="Arial"/>
+              </a:rPr>
+              <a:t>Capability</a:t>
+            </a:r>
+          </a:p>
+          <a:p>
+            <a:pPr algn="l">
+              <a:spcAft>
+                <a:spcPts val="300"/>
+              </a:spcAft>
+            </a:pPr>
+            <a:r>
+              <a:rPr sz="1250" b="0" i="0">
                 <a:solidFill>
                   <a:srgbClr val="1A1A1A"/>
                 </a:solidFill>
                 <a:latin typeface="Arial"/>
               </a:rPr>
-              <a:t>Capability  →  supported by  →  Application</a:t>
-            </a:r>
-          </a:p>
-        </p:txBody>
-      </p:sp>
-      <p:sp>
-        <p:nvSpPr>
-          <p:cNvPr id="7" name="Rectangle 6"/>
+              <a:t>what a body can do</a:t>
+            </a:r>
+          </a:p>
+        </p:txBody>
+      </p:sp>
+      <p:sp>
+        <p:nvSpPr>
+          <p:cNvPr id="6" name="Rounded Rectangle 5"/>
           <p:cNvSpPr/>
           <p:nvPr/>
         </p:nvSpPr>
         <p:spPr>
           <a:xfrm>
-            <a:off x="621792" y="3086100"/>
-            <a:ext cx="10881360" cy="12700"/>
-          </a:xfrm>
-          <a:prstGeom prst="rect">
-            <a:avLst/>
+            <a:off x="8183879" y="1600200"/>
+            <a:ext cx="2651760" cy="960120"/>
+          </a:xfrm>
+          <a:prstGeom prst="roundRect">
+            <a:avLst>
+              <a:gd name="adj" fmla="val 8000"/>
+            </a:avLst>
           </a:prstGeom>
           <a:solidFill>
-            <a:srgbClr val="DDECF4"/>
+            <a:srgbClr val="E5F5FB"/>
           </a:solidFill>
           <a:ln>
             <a:noFill/>
@@ -13459,68 +13495,60 @@
           </a:fontRef>
         </p:style>
         <p:txBody>
-          <a:bodyPr rtlCol="0" anchor="ctr"/>
+          <a:bodyPr rtlCol="0" anchor="t" lIns="128016" rIns="128016" tIns="91440" bIns="54864" wrap="square"/>
           <a:lstStyle/>
           <a:p>
-            <a:pPr algn="ctr"/>
-          </a:p>
-        </p:txBody>
-      </p:sp>
-      <p:sp>
-        <p:nvSpPr>
-          <p:cNvPr id="8" name="TextBox 7"/>
-          <p:cNvSpPr txBox="1"/>
-          <p:nvPr/>
-        </p:nvSpPr>
-        <p:spPr>
-          <a:xfrm>
-            <a:off x="658368" y="3127248"/>
-            <a:ext cx="10984687" cy="786384"/>
-          </a:xfrm>
-          <a:prstGeom prst="rect">
-            <a:avLst/>
-          </a:prstGeom>
-          <a:noFill/>
-        </p:spPr>
-        <p:txBody>
-          <a:bodyPr wrap="square">
-            <a:spAutoFit/>
-          </a:bodyPr>
-          <a:lstStyle/>
-          <a:p>
-            <a:pPr>
+            <a:pPr algn="l">
               <a:spcAft>
                 <a:spcPts val="300"/>
               </a:spcAft>
             </a:pPr>
             <a:r>
-              <a:rPr sz="2000" b="1" i="0">
+              <a:rPr sz="1500" b="1" i="0">
+                <a:solidFill>
+                  <a:srgbClr val="006E96"/>
+                </a:solidFill>
+                <a:latin typeface="Arial"/>
+              </a:rPr>
+              <a:t>Service</a:t>
+            </a:r>
+          </a:p>
+          <a:p>
+            <a:pPr algn="l">
+              <a:spcAft>
+                <a:spcPts val="300"/>
+              </a:spcAft>
+            </a:pPr>
+            <a:r>
+              <a:rPr sz="1250" b="0" i="0">
                 <a:solidFill>
                   <a:srgbClr val="1A1A1A"/>
                 </a:solidFill>
                 <a:latin typeface="Arial"/>
               </a:rPr>
-              <a:t>Application  →  uses  →  Data Domain</a:t>
-            </a:r>
-          </a:p>
-        </p:txBody>
-      </p:sp>
-      <p:sp>
-        <p:nvSpPr>
-          <p:cNvPr id="9" name="Rectangle 8"/>
+              <a:t>how it reaches a citizen or body</a:t>
+            </a:r>
+          </a:p>
+        </p:txBody>
+      </p:sp>
+      <p:sp>
+        <p:nvSpPr>
+          <p:cNvPr id="7" name="Rounded Rectangle 6"/>
           <p:cNvSpPr/>
           <p:nvPr/>
         </p:nvSpPr>
         <p:spPr>
           <a:xfrm>
-            <a:off x="621792" y="3918204"/>
-            <a:ext cx="10881360" cy="12700"/>
-          </a:xfrm>
-          <a:prstGeom prst="rect">
-            <a:avLst/>
+            <a:off x="3246120" y="3246120"/>
+            <a:ext cx="2651760" cy="960120"/>
+          </a:xfrm>
+          <a:prstGeom prst="roundRect">
+            <a:avLst>
+              <a:gd name="adj" fmla="val 8000"/>
+            </a:avLst>
           </a:prstGeom>
           <a:solidFill>
-            <a:srgbClr val="DDECF4"/>
+            <a:srgbClr val="E5F5FB"/>
           </a:solidFill>
           <a:ln>
             <a:noFill/>
@@ -13542,68 +13570,60 @@
           </a:fontRef>
         </p:style>
         <p:txBody>
-          <a:bodyPr rtlCol="0" anchor="ctr"/>
+          <a:bodyPr rtlCol="0" anchor="t" lIns="128016" rIns="128016" tIns="91440" bIns="54864" wrap="square"/>
           <a:lstStyle/>
           <a:p>
-            <a:pPr algn="ctr"/>
-          </a:p>
-        </p:txBody>
-      </p:sp>
-      <p:sp>
-        <p:nvSpPr>
-          <p:cNvPr id="10" name="TextBox 9"/>
-          <p:cNvSpPr txBox="1"/>
-          <p:nvPr/>
-        </p:nvSpPr>
-        <p:spPr>
-          <a:xfrm>
-            <a:off x="658368" y="3959352"/>
-            <a:ext cx="10984687" cy="786384"/>
-          </a:xfrm>
-          <a:prstGeom prst="rect">
-            <a:avLst/>
-          </a:prstGeom>
-          <a:noFill/>
-        </p:spPr>
-        <p:txBody>
-          <a:bodyPr wrap="square">
-            <a:spAutoFit/>
-          </a:bodyPr>
-          <a:lstStyle/>
-          <a:p>
-            <a:pPr>
+            <a:pPr algn="l">
               <a:spcAft>
                 <a:spcPts val="300"/>
               </a:spcAft>
             </a:pPr>
             <a:r>
-              <a:rPr sz="2000" b="1" i="0">
+              <a:rPr sz="1500" b="1" i="0">
+                <a:solidFill>
+                  <a:srgbClr val="006E96"/>
+                </a:solidFill>
+                <a:latin typeface="Arial"/>
+              </a:rPr>
+              <a:t>Application</a:t>
+            </a:r>
+          </a:p>
+          <a:p>
+            <a:pPr algn="l">
+              <a:spcAft>
+                <a:spcPts val="300"/>
+              </a:spcAft>
+            </a:pPr>
+            <a:r>
+              <a:rPr sz="1250" b="0" i="0">
                 <a:solidFill>
                   <a:srgbClr val="1A1A1A"/>
                 </a:solidFill>
                 <a:latin typeface="Arial"/>
               </a:rPr>
-              <a:t>Everything  →  runs on  →  Technology Component</a:t>
-            </a:r>
-          </a:p>
-        </p:txBody>
-      </p:sp>
-      <p:sp>
-        <p:nvSpPr>
-          <p:cNvPr id="11" name="Rectangle 10"/>
+              <a:t>the software that supports it</a:t>
+            </a:r>
+          </a:p>
+        </p:txBody>
+      </p:sp>
+      <p:sp>
+        <p:nvSpPr>
+          <p:cNvPr id="8" name="Rounded Rectangle 7"/>
           <p:cNvSpPr/>
           <p:nvPr/>
         </p:nvSpPr>
         <p:spPr>
           <a:xfrm>
-            <a:off x="621792" y="4750308"/>
-            <a:ext cx="10881360" cy="12700"/>
-          </a:xfrm>
-          <a:prstGeom prst="rect">
-            <a:avLst/>
+            <a:off x="8183879" y="3246120"/>
+            <a:ext cx="2651760" cy="960120"/>
+          </a:xfrm>
+          <a:prstGeom prst="roundRect">
+            <a:avLst>
+              <a:gd name="adj" fmla="val 8000"/>
+            </a:avLst>
           </a:prstGeom>
           <a:solidFill>
-            <a:srgbClr val="DDECF4"/>
+            <a:srgbClr val="E5F5FB"/>
           </a:solidFill>
           <a:ln>
             <a:noFill/>
@@ -13625,62 +13645,608 @@
           </a:fontRef>
         </p:style>
         <p:txBody>
-          <a:bodyPr rtlCol="0" anchor="ctr"/>
+          <a:bodyPr rtlCol="0" anchor="t" lIns="128016" rIns="128016" tIns="91440" bIns="54864" wrap="square"/>
           <a:lstStyle/>
           <a:p>
-            <a:pPr algn="ctr"/>
-          </a:p>
-        </p:txBody>
-      </p:sp>
-      <p:sp>
-        <p:nvSpPr>
-          <p:cNvPr id="12" name="TextBox 11"/>
-          <p:cNvSpPr txBox="1"/>
-          <p:nvPr/>
-        </p:nvSpPr>
-        <p:spPr>
-          <a:xfrm>
-            <a:off x="658368" y="4791456"/>
-            <a:ext cx="10984687" cy="786384"/>
-          </a:xfrm>
-          <a:prstGeom prst="rect">
-            <a:avLst/>
-          </a:prstGeom>
-          <a:noFill/>
-        </p:spPr>
-        <p:txBody>
-          <a:bodyPr wrap="square">
-            <a:spAutoFit/>
-          </a:bodyPr>
-          <a:lstStyle/>
-          <a:p>
-            <a:pPr>
+            <a:pPr algn="l">
               <a:spcAft>
                 <a:spcPts val="300"/>
               </a:spcAft>
             </a:pPr>
             <a:r>
-              <a:rPr sz="2000" b="1" i="0">
+              <a:rPr sz="1500" b="1" i="0">
+                <a:solidFill>
+                  <a:srgbClr val="006E96"/>
+                </a:solidFill>
+                <a:latin typeface="Arial"/>
+              </a:rPr>
+              <a:t>Data Domain</a:t>
+            </a:r>
+          </a:p>
+          <a:p>
+            <a:pPr algn="l">
+              <a:spcAft>
+                <a:spcPts val="300"/>
+              </a:spcAft>
+            </a:pPr>
+            <a:r>
+              <a:rPr sz="1250" b="0" i="0">
                 <a:solidFill>
                   <a:srgbClr val="1A1A1A"/>
                 </a:solidFill>
                 <a:latin typeface="Arial"/>
               </a:rPr>
-              <a:t>Organisation  →  owns  →  each of them</a:t>
-            </a:r>
-          </a:p>
-        </p:txBody>
-      </p:sp>
-      <p:sp>
-        <p:nvSpPr>
-          <p:cNvPr id="13" name="TextBox 12"/>
+              <a:t>a kind of information, one owner</a:t>
+            </a:r>
+          </a:p>
+        </p:txBody>
+      </p:sp>
+      <p:sp>
+        <p:nvSpPr>
+          <p:cNvPr id="9" name="Rounded Rectangle 8"/>
+          <p:cNvSpPr/>
+          <p:nvPr/>
+        </p:nvSpPr>
+        <p:spPr>
+          <a:xfrm>
+            <a:off x="3246120" y="4617720"/>
+            <a:ext cx="7589520" cy="822960"/>
+          </a:xfrm>
+          <a:prstGeom prst="roundRect">
+            <a:avLst>
+              <a:gd name="adj" fmla="val 8000"/>
+            </a:avLst>
+          </a:prstGeom>
+          <a:solidFill>
+            <a:srgbClr val="006E96"/>
+          </a:solidFill>
+          <a:ln>
+            <a:noFill/>
+          </a:ln>
+          <a:effectLst/>
+        </p:spPr>
+        <p:style>
+          <a:lnRef idx="1">
+            <a:schemeClr val="accent1"/>
+          </a:lnRef>
+          <a:fillRef idx="3">
+            <a:schemeClr val="accent1"/>
+          </a:fillRef>
+          <a:effectRef idx="2">
+            <a:schemeClr val="accent1"/>
+          </a:effectRef>
+          <a:fontRef idx="minor">
+            <a:schemeClr val="lt1"/>
+          </a:fontRef>
+        </p:style>
+        <p:txBody>
+          <a:bodyPr rtlCol="0" anchor="t" lIns="128016" rIns="128016" tIns="91440" bIns="54864" wrap="square"/>
+          <a:lstStyle/>
+          <a:p>
+            <a:pPr algn="l">
+              <a:spcAft>
+                <a:spcPts val="300"/>
+              </a:spcAft>
+            </a:pPr>
+            <a:r>
+              <a:rPr sz="1500" b="1" i="0">
+                <a:solidFill>
+                  <a:srgbClr val="FFFFFF"/>
+                </a:solidFill>
+                <a:latin typeface="Arial"/>
+              </a:rPr>
+              <a:t>Technology Component</a:t>
+            </a:r>
+          </a:p>
+          <a:p>
+            <a:pPr algn="l">
+              <a:spcAft>
+                <a:spcPts val="300"/>
+              </a:spcAft>
+            </a:pPr>
+            <a:r>
+              <a:rPr sz="1250" b="0" i="0">
+                <a:solidFill>
+                  <a:srgbClr val="FFFFFF"/>
+                </a:solidFill>
+                <a:latin typeface="Arial"/>
+              </a:rPr>
+              <a:t>the infrastructure underneath</a:t>
+            </a:r>
+          </a:p>
+        </p:txBody>
+      </p:sp>
+      <p:cxnSp>
+        <p:nvCxnSpPr>
+          <p:cNvPr id="10" name="Connector 9"/>
+          <p:cNvCxnSpPr/>
+          <p:nvPr/>
+        </p:nvCxnSpPr>
+        <p:spPr>
+          <a:xfrm>
+            <a:off x="5897879" y="2080260"/>
+            <a:ext cx="2286000" cy="0"/>
+          </a:xfrm>
+          <a:prstGeom prst="line">
+            <a:avLst/>
+          </a:prstGeom>
+          <a:ln w="19050">
+            <a:solidFill>
+              <a:srgbClr val="006E96"/>
+            </a:solidFill>
+            <a:tailEnd type="triangle" w="med" len="med"/>
+          </a:ln>
+        </p:spPr>
+        <p:style>
+          <a:lnRef idx="2">
+            <a:schemeClr val="accent1"/>
+          </a:lnRef>
+          <a:fillRef idx="0">
+            <a:schemeClr val="accent1"/>
+          </a:fillRef>
+          <a:effectRef idx="1">
+            <a:schemeClr val="accent1"/>
+          </a:effectRef>
+          <a:fontRef idx="minor">
+            <a:schemeClr val="tx1"/>
+          </a:fontRef>
+        </p:style>
+      </p:cxnSp>
+      <p:sp>
+        <p:nvSpPr>
+          <p:cNvPr id="11" name="Rectangle 10"/>
+          <p:cNvSpPr/>
+          <p:nvPr/>
+        </p:nvSpPr>
+        <p:spPr>
+          <a:xfrm>
+            <a:off x="6400799" y="1897379"/>
+            <a:ext cx="1280160" cy="365760"/>
+          </a:xfrm>
+          <a:prstGeom prst="rect">
+            <a:avLst/>
+          </a:prstGeom>
+          <a:solidFill>
+            <a:srgbClr val="FFFFFF"/>
+          </a:solidFill>
+          <a:ln>
+            <a:noFill/>
+          </a:ln>
+          <a:effectLst/>
+        </p:spPr>
+        <p:style>
+          <a:lnRef idx="1">
+            <a:schemeClr val="accent1"/>
+          </a:lnRef>
+          <a:fillRef idx="3">
+            <a:schemeClr val="accent1"/>
+          </a:fillRef>
+          <a:effectRef idx="2">
+            <a:schemeClr val="accent1"/>
+          </a:effectRef>
+          <a:fontRef idx="minor">
+            <a:schemeClr val="lt1"/>
+          </a:fontRef>
+        </p:style>
+        <p:txBody>
+          <a:bodyPr rtlCol="0" anchor="ctr" lIns="36576" rIns="36576" tIns="0" bIns="0" wrap="square"/>
+          <a:lstStyle/>
+          <a:p>
+            <a:pPr algn="ctr"/>
+            <a:r>
+              <a:rPr sz="1200" b="1" i="0">
+                <a:solidFill>
+                  <a:srgbClr val="006E96"/>
+                </a:solidFill>
+                <a:latin typeface="Arial"/>
+              </a:rPr>
+              <a:t>delivered by</a:t>
+            </a:r>
+          </a:p>
+        </p:txBody>
+      </p:sp>
+      <p:cxnSp>
+        <p:nvCxnSpPr>
+          <p:cNvPr id="12" name="Connector 11"/>
+          <p:cNvCxnSpPr/>
+          <p:nvPr/>
+        </p:nvCxnSpPr>
+        <p:spPr>
+          <a:xfrm>
+            <a:off x="4572000" y="2560320"/>
+            <a:ext cx="0" cy="685800"/>
+          </a:xfrm>
+          <a:prstGeom prst="line">
+            <a:avLst/>
+          </a:prstGeom>
+          <a:ln w="19050">
+            <a:solidFill>
+              <a:srgbClr val="006E96"/>
+            </a:solidFill>
+            <a:tailEnd type="triangle" w="med" len="med"/>
+          </a:ln>
+        </p:spPr>
+        <p:style>
+          <a:lnRef idx="2">
+            <a:schemeClr val="accent1"/>
+          </a:lnRef>
+          <a:fillRef idx="0">
+            <a:schemeClr val="accent1"/>
+          </a:fillRef>
+          <a:effectRef idx="1">
+            <a:schemeClr val="accent1"/>
+          </a:effectRef>
+          <a:fontRef idx="minor">
+            <a:schemeClr val="tx1"/>
+          </a:fontRef>
+        </p:style>
+      </p:cxnSp>
+      <p:sp>
+        <p:nvSpPr>
+          <p:cNvPr id="13" name="Rectangle 12"/>
+          <p:cNvSpPr/>
+          <p:nvPr/>
+        </p:nvSpPr>
+        <p:spPr>
+          <a:xfrm>
+            <a:off x="4681728" y="2715768"/>
+            <a:ext cx="1371600" cy="365760"/>
+          </a:xfrm>
+          <a:prstGeom prst="rect">
+            <a:avLst/>
+          </a:prstGeom>
+          <a:solidFill>
+            <a:srgbClr val="FFFFFF"/>
+          </a:solidFill>
+          <a:ln>
+            <a:noFill/>
+          </a:ln>
+          <a:effectLst/>
+        </p:spPr>
+        <p:style>
+          <a:lnRef idx="1">
+            <a:schemeClr val="accent1"/>
+          </a:lnRef>
+          <a:fillRef idx="3">
+            <a:schemeClr val="accent1"/>
+          </a:fillRef>
+          <a:effectRef idx="2">
+            <a:schemeClr val="accent1"/>
+          </a:effectRef>
+          <a:fontRef idx="minor">
+            <a:schemeClr val="lt1"/>
+          </a:fontRef>
+        </p:style>
+        <p:txBody>
+          <a:bodyPr rtlCol="0" anchor="ctr" lIns="36576" rIns="36576" tIns="0" bIns="0" wrap="square"/>
+          <a:lstStyle/>
+          <a:p>
+            <a:pPr algn="l"/>
+            <a:r>
+              <a:rPr sz="1200" b="1" i="0">
+                <a:solidFill>
+                  <a:srgbClr val="006E96"/>
+                </a:solidFill>
+                <a:latin typeface="Arial"/>
+              </a:rPr>
+              <a:t>supported by</a:t>
+            </a:r>
+          </a:p>
+        </p:txBody>
+      </p:sp>
+      <p:cxnSp>
+        <p:nvCxnSpPr>
+          <p:cNvPr id="14" name="Connector 13"/>
+          <p:cNvCxnSpPr/>
+          <p:nvPr/>
+        </p:nvCxnSpPr>
+        <p:spPr>
+          <a:xfrm>
+            <a:off x="5897879" y="3726180"/>
+            <a:ext cx="2286000" cy="0"/>
+          </a:xfrm>
+          <a:prstGeom prst="line">
+            <a:avLst/>
+          </a:prstGeom>
+          <a:ln w="19050">
+            <a:solidFill>
+              <a:srgbClr val="006E96"/>
+            </a:solidFill>
+            <a:tailEnd type="triangle" w="med" len="med"/>
+          </a:ln>
+        </p:spPr>
+        <p:style>
+          <a:lnRef idx="2">
+            <a:schemeClr val="accent1"/>
+          </a:lnRef>
+          <a:fillRef idx="0">
+            <a:schemeClr val="accent1"/>
+          </a:fillRef>
+          <a:effectRef idx="1">
+            <a:schemeClr val="accent1"/>
+          </a:effectRef>
+          <a:fontRef idx="minor">
+            <a:schemeClr val="tx1"/>
+          </a:fontRef>
+        </p:style>
+      </p:cxnSp>
+      <p:sp>
+        <p:nvSpPr>
+          <p:cNvPr id="15" name="Rectangle 14"/>
+          <p:cNvSpPr/>
+          <p:nvPr/>
+        </p:nvSpPr>
+        <p:spPr>
+          <a:xfrm>
+            <a:off x="6720840" y="3543300"/>
+            <a:ext cx="822960" cy="365760"/>
+          </a:xfrm>
+          <a:prstGeom prst="rect">
+            <a:avLst/>
+          </a:prstGeom>
+          <a:solidFill>
+            <a:srgbClr val="FFFFFF"/>
+          </a:solidFill>
+          <a:ln>
+            <a:noFill/>
+          </a:ln>
+          <a:effectLst/>
+        </p:spPr>
+        <p:style>
+          <a:lnRef idx="1">
+            <a:schemeClr val="accent1"/>
+          </a:lnRef>
+          <a:fillRef idx="3">
+            <a:schemeClr val="accent1"/>
+          </a:fillRef>
+          <a:effectRef idx="2">
+            <a:schemeClr val="accent1"/>
+          </a:effectRef>
+          <a:fontRef idx="minor">
+            <a:schemeClr val="lt1"/>
+          </a:fontRef>
+        </p:style>
+        <p:txBody>
+          <a:bodyPr rtlCol="0" anchor="ctr" lIns="36576" rIns="36576" tIns="0" bIns="0" wrap="square"/>
+          <a:lstStyle/>
+          <a:p>
+            <a:pPr algn="ctr"/>
+            <a:r>
+              <a:rPr sz="1200" b="1" i="0">
+                <a:solidFill>
+                  <a:srgbClr val="006E96"/>
+                </a:solidFill>
+                <a:latin typeface="Arial"/>
+              </a:rPr>
+              <a:t>uses</a:t>
+            </a:r>
+          </a:p>
+        </p:txBody>
+      </p:sp>
+      <p:cxnSp>
+        <p:nvCxnSpPr>
+          <p:cNvPr id="16" name="Connector 15"/>
+          <p:cNvCxnSpPr/>
+          <p:nvPr/>
+        </p:nvCxnSpPr>
+        <p:spPr>
+          <a:xfrm>
+            <a:off x="4572000" y="4206240"/>
+            <a:ext cx="0" cy="411480"/>
+          </a:xfrm>
+          <a:prstGeom prst="line">
+            <a:avLst/>
+          </a:prstGeom>
+          <a:ln w="19050">
+            <a:solidFill>
+              <a:srgbClr val="006E96"/>
+            </a:solidFill>
+            <a:tailEnd type="triangle" w="med" len="med"/>
+          </a:ln>
+        </p:spPr>
+        <p:style>
+          <a:lnRef idx="2">
+            <a:schemeClr val="accent1"/>
+          </a:lnRef>
+          <a:fillRef idx="0">
+            <a:schemeClr val="accent1"/>
+          </a:fillRef>
+          <a:effectRef idx="1">
+            <a:schemeClr val="accent1"/>
+          </a:effectRef>
+          <a:fontRef idx="minor">
+            <a:schemeClr val="tx1"/>
+          </a:fontRef>
+        </p:style>
+      </p:cxnSp>
+      <p:cxnSp>
+        <p:nvCxnSpPr>
+          <p:cNvPr id="17" name="Connector 16"/>
+          <p:cNvCxnSpPr/>
+          <p:nvPr/>
+        </p:nvCxnSpPr>
+        <p:spPr>
+          <a:xfrm>
+            <a:off x="9509759" y="4206240"/>
+            <a:ext cx="0" cy="411480"/>
+          </a:xfrm>
+          <a:prstGeom prst="line">
+            <a:avLst/>
+          </a:prstGeom>
+          <a:ln w="19050">
+            <a:solidFill>
+              <a:srgbClr val="006E96"/>
+            </a:solidFill>
+            <a:tailEnd type="triangle" w="med" len="med"/>
+          </a:ln>
+        </p:spPr>
+        <p:style>
+          <a:lnRef idx="2">
+            <a:schemeClr val="accent1"/>
+          </a:lnRef>
+          <a:fillRef idx="0">
+            <a:schemeClr val="accent1"/>
+          </a:fillRef>
+          <a:effectRef idx="1">
+            <a:schemeClr val="accent1"/>
+          </a:effectRef>
+          <a:fontRef idx="minor">
+            <a:schemeClr val="tx1"/>
+          </a:fontRef>
+        </p:style>
+      </p:cxnSp>
+      <p:sp>
+        <p:nvSpPr>
+          <p:cNvPr id="18" name="Rectangle 17"/>
+          <p:cNvSpPr/>
+          <p:nvPr/>
+        </p:nvSpPr>
+        <p:spPr>
+          <a:xfrm>
+            <a:off x="6172199" y="4251959"/>
+            <a:ext cx="1920240" cy="329184"/>
+          </a:xfrm>
+          <a:prstGeom prst="rect">
+            <a:avLst/>
+          </a:prstGeom>
+          <a:solidFill>
+            <a:srgbClr val="FFFFFF"/>
+          </a:solidFill>
+          <a:ln>
+            <a:noFill/>
+          </a:ln>
+          <a:effectLst/>
+        </p:spPr>
+        <p:style>
+          <a:lnRef idx="1">
+            <a:schemeClr val="accent1"/>
+          </a:lnRef>
+          <a:fillRef idx="3">
+            <a:schemeClr val="accent1"/>
+          </a:fillRef>
+          <a:effectRef idx="2">
+            <a:schemeClr val="accent1"/>
+          </a:effectRef>
+          <a:fontRef idx="minor">
+            <a:schemeClr val="lt1"/>
+          </a:fontRef>
+        </p:style>
+        <p:txBody>
+          <a:bodyPr rtlCol="0" anchor="ctr" lIns="36576" rIns="36576" tIns="0" bIns="0" wrap="square"/>
+          <a:lstStyle/>
+          <a:p>
+            <a:pPr algn="ctr"/>
+            <a:r>
+              <a:rPr sz="1200" b="1" i="0">
+                <a:solidFill>
+                  <a:srgbClr val="006E96"/>
+                </a:solidFill>
+                <a:latin typeface="Arial"/>
+              </a:rPr>
+              <a:t>everything runs on</a:t>
+            </a:r>
+          </a:p>
+        </p:txBody>
+      </p:sp>
+      <p:cxnSp>
+        <p:nvCxnSpPr>
+          <p:cNvPr id="19" name="Connector 18"/>
+          <p:cNvCxnSpPr/>
+          <p:nvPr/>
+        </p:nvCxnSpPr>
+        <p:spPr>
+          <a:xfrm>
+            <a:off x="2487168" y="3520440"/>
+            <a:ext cx="758952" cy="0"/>
+          </a:xfrm>
+          <a:prstGeom prst="line">
+            <a:avLst/>
+          </a:prstGeom>
+          <a:ln w="19050">
+            <a:solidFill>
+              <a:srgbClr val="006E96"/>
+            </a:solidFill>
+            <a:tailEnd type="triangle" w="med" len="med"/>
+          </a:ln>
+        </p:spPr>
+        <p:style>
+          <a:lnRef idx="2">
+            <a:schemeClr val="accent1"/>
+          </a:lnRef>
+          <a:fillRef idx="0">
+            <a:schemeClr val="accent1"/>
+          </a:fillRef>
+          <a:effectRef idx="1">
+            <a:schemeClr val="accent1"/>
+          </a:effectRef>
+          <a:fontRef idx="minor">
+            <a:schemeClr val="tx1"/>
+          </a:fontRef>
+        </p:style>
+      </p:cxnSp>
+      <p:sp>
+        <p:nvSpPr>
+          <p:cNvPr id="20" name="Rectangle 19"/>
+          <p:cNvSpPr/>
+          <p:nvPr/>
+        </p:nvSpPr>
+        <p:spPr>
+          <a:xfrm>
+            <a:off x="2505456" y="3136392"/>
+            <a:ext cx="731520" cy="329184"/>
+          </a:xfrm>
+          <a:prstGeom prst="rect">
+            <a:avLst/>
+          </a:prstGeom>
+          <a:solidFill>
+            <a:srgbClr val="FFFFFF"/>
+          </a:solidFill>
+          <a:ln>
+            <a:noFill/>
+          </a:ln>
+          <a:effectLst/>
+        </p:spPr>
+        <p:style>
+          <a:lnRef idx="1">
+            <a:schemeClr val="accent1"/>
+          </a:lnRef>
+          <a:fillRef idx="3">
+            <a:schemeClr val="accent1"/>
+          </a:fillRef>
+          <a:effectRef idx="2">
+            <a:schemeClr val="accent1"/>
+          </a:effectRef>
+          <a:fontRef idx="minor">
+            <a:schemeClr val="lt1"/>
+          </a:fontRef>
+        </p:style>
+        <p:txBody>
+          <a:bodyPr rtlCol="0" anchor="ctr" lIns="36576" rIns="36576" tIns="0" bIns="0" wrap="square"/>
+          <a:lstStyle/>
+          <a:p>
+            <a:pPr algn="ctr"/>
+            <a:r>
+              <a:rPr sz="1200" b="1" i="0">
+                <a:solidFill>
+                  <a:srgbClr val="006E96"/>
+                </a:solidFill>
+                <a:latin typeface="Arial"/>
+              </a:rPr>
+              <a:t>owns</a:t>
+            </a:r>
+          </a:p>
+        </p:txBody>
+      </p:sp>
+      <p:sp>
+        <p:nvSpPr>
+          <p:cNvPr id="21" name="TextBox 20"/>
           <p:cNvSpPr txBox="1"/>
           <p:nvPr/>
         </p:nvSpPr>
         <p:spPr>
           <a:xfrm>
-            <a:off x="658368" y="5852160"/>
-            <a:ext cx="10881360" cy="457200"/>
+            <a:off x="658368" y="5760720"/>
+            <a:ext cx="10881360" cy="548640"/>
           </a:xfrm>
           <a:prstGeom prst="rect">
             <a:avLst/>
@@ -13707,7 +14273,7 @@
       </p:sp>
       <p:sp>
         <p:nvSpPr>
-          <p:cNvPr id="14" name="TextBox 13"/>
+          <p:cNvPr id="22" name="TextBox 21"/>
           <p:cNvSpPr txBox="1"/>
           <p:nvPr/>
         </p:nvSpPr>
